--- a/decks/maths-speed/maths-speed_ch5_reading-graphs.pptx
+++ b/decks/maths-speed/maths-speed_ch5_reading-graphs.pptx
@@ -125,29 +125,29 @@
   <p:extLst>
     <p:ext uri="{521415D9-36F7-43E2-AB2F-B90AF26B5E84}">
       <p14:sectionLst xmlns:p14="http://schemas.microsoft.com/office/powerpoint/2010/main">
-        <p14:section name="Opening" id="{32d1ecec-8d16-384e-c3be-d90d4e346240}">
+        <p14:section name="Opening" id="{b077fbf1-98ac-e761-1107-856fdfc74830}">
           <p14:sldIdLst>
             <p14:sldId id="256"/>
           </p14:sldIdLst>
         </p14:section>
-        <p14:section name="Gate" id="{3db10f87-1383-f57f-184b-c9d0cefd1d30}">
+        <p14:section name="Gate" id="{072e33ce-c7c7-1ec7-9dc0-4872942b0987}">
           <p14:sldIdLst>
             <p14:sldId id="257"/>
             <p14:sldId id="258"/>
           </p14:sldIdLst>
         </p14:section>
-        <p14:section name="Pre-teach" id="{8349cb15-e6e1-b8ba-eb61-02a5e9651cc9}">
+        <p14:section name="Pre-teach" id="{e4a20a95-5d43-e117-5abd-a580eee61a47}">
           <p14:sldIdLst>
             <p14:sldId id="259"/>
             <p14:sldId id="260"/>
           </p14:sldIdLst>
         </p14:section>
-        <p14:section name="Read-along" id="{8785fa15-be4f-f56e-f454-78ebfdea8f70}">
+        <p14:section name="Read-along" id="{87340375-5c27-6256-2a4d-cfea08242fc4}">
           <p14:sldIdLst>
             <p14:sldId id="261"/>
           </p14:sldIdLst>
         </p14:section>
-        <p14:section name="Teach" id="{386019b7-250f-54cc-781b-2ea37b2e3530}">
+        <p14:section name="Teach" id="{4d98ef16-4914-2edd-102e-f3fb55c6fc32}">
           <p14:sldIdLst>
             <p14:sldId id="262"/>
             <p14:sldId id="263"/>
@@ -157,19 +157,19 @@
             <p14:sldId id="267"/>
           </p14:sldIdLst>
         </p14:section>
-        <p14:section name="Routes" id="{76f93f2f-efc3-fc66-313b-4f636454db93}">
+        <p14:section name="Routes" id="{0010655b-aae7-5929-7c3a-247c641f6f60}">
           <p14:sldIdLst>
             <p14:sldId id="268"/>
             <p14:sldId id="269"/>
             <p14:sldId id="270"/>
           </p14:sldIdLst>
         </p14:section>
-        <p14:section name="Close" id="{ed605d84-97d6-7fd6-da48-1b28b079e50d}">
+        <p14:section name="Close" id="{f65460b2-c6e6-517e-c3da-433dda7fed52}">
           <p14:sldIdLst>
             <p14:sldId id="271"/>
           </p14:sldIdLst>
         </p14:section>
-        <p14:section name="Answers" id="{672ec177-771c-9dfa-45d9-a8d9166a5ceb}">
+        <p14:section name="Answers" id="{eee2b6ab-4ae4-5003-e068-4f5dfb15e08d}">
           <p14:sldIdLst>
             <p14:sldId id="272"/>
             <p14:sldId id="273"/>
@@ -1234,7 +1234,7 @@
               <a:rPr lang="en-US" dirty="0"/>
               <a:t>Exit ticket — individual, silent, on a slip or mini-whiteboard. Recall before help: no notes, no lanes, no hints. Collect before pupils leave.
 Question: A graph of a car journey: the line slopes up from 0 km to 20 km between 0 and 1 hour, is flat from 1 hour to 1 hour 30 minutes, then slopes up more steeply to 50 km at 2 hours 30 minutes. Which statement is true?
-Answer: B   The car travels 30 km in the final part. The final part rises from 20 km to 50 km, so the car travels 50 − 20 = 30 km. The stop lasts 30 minutes, the graph shows no hills, and the total is 50 km.
+Answer: D   The car travels 30 km in the final part. The final part rises from 20 km to 50 km, so the car travels 50 − 20 = 30 km. The stop lasts 30 minutes, the graph shows no hills, and the total is 50 km.
 Source of this question: module 3 task ("True or false about a graph") from the manifest.
 Sort the slips: correct → ready to move on; incorrect → start next lesson in the pre-teach group, with the read-along and the Support lane. Same destination next time.</a:t>
             </a:r>
@@ -1507,7 +1507,7 @@
             <a:r>
               <a:rPr lang="en-US" dirty="0"/>
               <a:t>Answers — exit ticket: Exit ticket. Reveal the answer; pupils mark their own work in a different colour, then read the "why" together. Same destination for every lane, so one answer serves the whole class.
-Answer: B   The car travels 30 km in the final part
+Answer: D   The car travels 30 km in the final part
 Why: The final part rises from 20 km to 50 km, so the car travels 50 − 20 = 30 km. The stop lasts 30 minutes, the graph shows no hills, and the total is 50 km.
 Ask a Support pupil to explain one step, and a Stretch pupil to share their extension.</a:t>
             </a:r>
@@ -1598,9 +1598,9 @@
             <a:r>
               <a:rPr lang="en-US" dirty="0"/>
               <a:t>Do now — retrieval. Silent, no notes, no help: recall comes before any support. Give about four minutes.
-1. On a distance–time graph, what does a horizontal line show?  →  B   stationary, not moving
+1. On a distance–time graph, what does a horizontal line show?  →  A   stationary, not moving
 2. Dora's graph rises from 0 m to 1200 m between 0 and 15 minutes, stays flat until 24 minutes, then rises to 2000 m at 40 minutes. For how many minutes was Dora stationary?  →  9 minutes
-3. Which axis shows time on a distance–time graph?  →  A   the horizontal axis, along the bottom
+3. Which axis shows time on a distance–time graph?  →  B   the horizontal axis, along the bottom
 Circulate: who gets 3/3 (Stretch route), 2/3 (Core), 0–1 (Support)? Use this to route pupils later in the lesson.</a:t>
             </a:r>
             <a:endParaRPr lang="en-US" dirty="0"/>
@@ -1690,9 +1690,9 @@
             <a:r>
               <a:rPr lang="en-US" dirty="0"/>
               <a:t>Answers — pupils mark their own in a different colour, then hands up for 3/3, 2/3, 1/3.
-1. B   stationary, not moving. On a horizontal line time passes but the distance stays the same, so the person is stationary.
+1. A   stationary, not moving. On a horizontal line time passes but the distance stays the same, so the person is stationary.
 2. 9 minutes. The flat part of the graph runs from 15 minutes to 24 minutes. 24 − 15 = 9 minutes.
-3. A   the horizontal axis, along the bottom. Time runs along the horizontal axis, so the graph reads like a story from left to right.
+3. B   the horizontal axis, along the bottom. Time runs along the horizontal axis, so the graph reads like a story from left to right.
 Say the route each score points to: 3/3 Stretch, 2/3 Core, 0–1 Support. Pupils may choose to move up.</a:t>
             </a:r>
             <a:endParaRPr lang="en-US" dirty="0"/>
@@ -9438,7 +9438,7 @@
                 <a:ea typeface="Calibri" pitchFamily="34" charset="-122"/>
                 <a:cs typeface="Calibri" pitchFamily="34" charset="-120"/>
               </a:rPr>
-              <a:t>The car travels 30 km in the final part</a:t>
+              <a:t>The car travels 20 km in total</a:t>
             </a:r>
             <a:endParaRPr lang="en-US" sz="2200" dirty="0"/>
           </a:p>
@@ -9512,7 +9512,7 @@
                 <a:ea typeface="Calibri" pitchFamily="34" charset="-122"/>
                 <a:cs typeface="Calibri" pitchFamily="34" charset="-120"/>
               </a:rPr>
-              <a:t>The car travels 20 km in total</a:t>
+              <a:t>The car travels 30 km in the final part</a:t>
             </a:r>
             <a:endParaRPr lang="en-US" sz="2200" dirty="0"/>
           </a:p>
@@ -10835,7 +10835,7 @@
                 <a:ea typeface="Cambria" pitchFamily="34" charset="-122"/>
                 <a:cs typeface="Cambria" pitchFamily="34" charset="-120"/>
               </a:rPr>
-              <a:t>B   The car travels 30 km in the final part</a:t>
+              <a:t>D   The car travels 30 km in the final part</a:t>
             </a:r>
             <a:endParaRPr lang="en-US" sz="1800" dirty="0"/>
           </a:p>
@@ -11369,7 +11369,7 @@
                 <a:ea typeface="Calibri" pitchFamily="34" charset="-122"/>
                 <a:cs typeface="Calibri" pitchFamily="34" charset="-120"/>
               </a:rPr>
-              <a:t>moving at a steady speed</a:t>
+              <a:t>stationary, not moving</a:t>
             </a:r>
             <a:endParaRPr lang="en-US" sz="2200" dirty="0"/>
           </a:p>
@@ -11406,7 +11406,7 @@
                 <a:ea typeface="Calibri" pitchFamily="34" charset="-122"/>
                 <a:cs typeface="Calibri" pitchFamily="34" charset="-120"/>
               </a:rPr>
-              <a:t>stationary, not moving</a:t>
+              <a:t>speeding up</a:t>
             </a:r>
             <a:endParaRPr lang="en-US" sz="2200" dirty="0"/>
           </a:p>
@@ -11443,7 +11443,7 @@
                 <a:ea typeface="Calibri" pitchFamily="34" charset="-122"/>
                 <a:cs typeface="Calibri" pitchFamily="34" charset="-120"/>
               </a:rPr>
-              <a:t>speeding up</a:t>
+              <a:t>moving at a steady speed</a:t>
             </a:r>
             <a:endParaRPr lang="en-US" sz="2200" dirty="0"/>
           </a:p>
@@ -11882,7 +11882,7 @@
                 <a:ea typeface="Calibri" pitchFamily="34" charset="-122"/>
                 <a:cs typeface="Calibri" pitchFamily="34" charset="-120"/>
               </a:rPr>
-              <a:t>the horizontal axis, along the bottom</a:t>
+              <a:t>either axis, it does not matter</a:t>
             </a:r>
             <a:endParaRPr lang="en-US" sz="2200" dirty="0"/>
           </a:p>
@@ -11919,7 +11919,7 @@
                 <a:ea typeface="Calibri" pitchFamily="34" charset="-122"/>
                 <a:cs typeface="Calibri" pitchFamily="34" charset="-120"/>
               </a:rPr>
-              <a:t>the vertical axis, up the side</a:t>
+              <a:t>the horizontal axis, along the bottom</a:t>
             </a:r>
             <a:endParaRPr lang="en-US" sz="2200" dirty="0"/>
           </a:p>
@@ -11956,7 +11956,7 @@
                 <a:ea typeface="Calibri" pitchFamily="34" charset="-122"/>
                 <a:cs typeface="Calibri" pitchFamily="34" charset="-120"/>
               </a:rPr>
-              <a:t>either axis, it does not matter</a:t>
+              <a:t>the vertical axis, up the side</a:t>
             </a:r>
             <a:endParaRPr lang="en-US" sz="2200" dirty="0"/>
           </a:p>
@@ -12357,7 +12357,7 @@
                 <a:ea typeface="Calibri" pitchFamily="34" charset="-122"/>
                 <a:cs typeface="Calibri" pitchFamily="34" charset="-120"/>
               </a:rPr>
-              <a:t>B   stationary, not moving</a:t>
+              <a:t>A   stationary, not moving</a:t>
             </a:r>
             <a:endParaRPr lang="en-US" sz="2200" dirty="0"/>
           </a:p>
@@ -12857,7 +12857,7 @@
                 <a:ea typeface="Calibri" pitchFamily="34" charset="-122"/>
                 <a:cs typeface="Calibri" pitchFamily="34" charset="-120"/>
               </a:rPr>
-              <a:t>A   the horizontal axis, along the bottom</a:t>
+              <a:t>B   the horizontal axis, along the bottom</a:t>
             </a:r>
             <a:endParaRPr lang="en-US" sz="2200" dirty="0"/>
           </a:p>

--- a/decks/maths-speed/maths-speed_ch5_reading-graphs.pptx
+++ b/decks/maths-speed/maths-speed_ch5_reading-graphs.pptx
@@ -125,29 +125,29 @@
   <p:extLst>
     <p:ext uri="{521415D9-36F7-43E2-AB2F-B90AF26B5E84}">
       <p14:sectionLst xmlns:p14="http://schemas.microsoft.com/office/powerpoint/2010/main">
-        <p14:section name="Opening" id="{b077fbf1-98ac-e761-1107-856fdfc74830}">
+        <p14:section name="Opening" id="{03e3f34f-d75d-342c-f6e3-daeb8d7b0747}">
           <p14:sldIdLst>
             <p14:sldId id="256"/>
           </p14:sldIdLst>
         </p14:section>
-        <p14:section name="Gate" id="{072e33ce-c7c7-1ec7-9dc0-4872942b0987}">
+        <p14:section name="Gate" id="{25968e6b-72bd-ff9e-0485-e45e85920bb0}">
           <p14:sldIdLst>
             <p14:sldId id="257"/>
             <p14:sldId id="258"/>
           </p14:sldIdLst>
         </p14:section>
-        <p14:section name="Pre-teach" id="{e4a20a95-5d43-e117-5abd-a580eee61a47}">
+        <p14:section name="Pre-teach" id="{2d2f514c-052f-da85-bcd2-34caedc6d7d4}">
           <p14:sldIdLst>
             <p14:sldId id="259"/>
             <p14:sldId id="260"/>
           </p14:sldIdLst>
         </p14:section>
-        <p14:section name="Read-along" id="{87340375-5c27-6256-2a4d-cfea08242fc4}">
+        <p14:section name="Read-along" id="{7786b7e4-87e7-9995-fedd-5e59fa80b364}">
           <p14:sldIdLst>
             <p14:sldId id="261"/>
           </p14:sldIdLst>
         </p14:section>
-        <p14:section name="Teach" id="{4d98ef16-4914-2edd-102e-f3fb55c6fc32}">
+        <p14:section name="Teach" id="{ffa6718c-003a-ee3b-6b83-db3f733c23f0}">
           <p14:sldIdLst>
             <p14:sldId id="262"/>
             <p14:sldId id="263"/>
@@ -157,19 +157,19 @@
             <p14:sldId id="267"/>
           </p14:sldIdLst>
         </p14:section>
-        <p14:section name="Routes" id="{0010655b-aae7-5929-7c3a-247c641f6f60}">
+        <p14:section name="Routes" id="{16146b40-853d-1073-7873-51d9bd003bf7}">
           <p14:sldIdLst>
             <p14:sldId id="268"/>
             <p14:sldId id="269"/>
             <p14:sldId id="270"/>
           </p14:sldIdLst>
         </p14:section>
-        <p14:section name="Close" id="{f65460b2-c6e6-517e-c3da-433dda7fed52}">
+        <p14:section name="Close" id="{728bd890-3215-7940-2961-1eba666243e9}">
           <p14:sldIdLst>
             <p14:sldId id="271"/>
           </p14:sldIdLst>
         </p14:section>
-        <p14:section name="Answers" id="{eee2b6ab-4ae4-5003-e068-4f5dfb15e08d}">
+        <p14:section name="Answers" id="{450feb89-c272-5b1f-1468-336290052850}">
           <p14:sldIdLst>
             <p14:sldId id="272"/>
             <p14:sldId id="273"/>
